--- a/Slides/Week03/03：編碼器模型.pptx
+++ b/Slides/Week03/03：編碼器模型.pptx
@@ -112,6 +112,11 @@
       </a:defRPr>
     </a:lvl9pPr>
   </p:defaultTextStyle>
+  <p:extLst>
+    <p:ext uri="{EFAFB233-063F-42B5-8137-9DF3F51BA10A}">
+      <p15:sldGuideLst xmlns:p15="http://schemas.microsoft.com/office/powerpoint/2012/main"/>
+    </p:ext>
+  </p:extLst>
 </p:presentation>
 </file>
 
@@ -197,7 +202,7 @@
           <a:p>
             <a:fld id="{DF2768FB-F680-46BA-8721-EBD5055783A4}" type="datetimeFigureOut">
               <a:rPr lang="zh-TW" altLang="en-US" smtClean="0"/>
-              <a:t>2024/3/29</a:t>
+              <a:t>2024/12/4</a:t>
             </a:fld>
             <a:endParaRPr lang="zh-TW" altLang="en-US"/>
           </a:p>
@@ -1145,7 +1150,7 @@
           <a:p>
             <a:fld id="{0495B665-C8E0-4414-8FEF-82ED686654F1}" type="datetimeFigureOut">
               <a:rPr lang="zh-TW" altLang="en-US" smtClean="0"/>
-              <a:t>2024/3/29</a:t>
+              <a:t>2024/12/4</a:t>
             </a:fld>
             <a:endParaRPr lang="zh-TW" altLang="en-US"/>
           </a:p>
@@ -1343,7 +1348,7 @@
           <a:p>
             <a:fld id="{0495B665-C8E0-4414-8FEF-82ED686654F1}" type="datetimeFigureOut">
               <a:rPr lang="zh-TW" altLang="en-US" smtClean="0"/>
-              <a:t>2024/3/29</a:t>
+              <a:t>2024/12/4</a:t>
             </a:fld>
             <a:endParaRPr lang="zh-TW" altLang="en-US"/>
           </a:p>
@@ -1551,7 +1556,7 @@
           <a:p>
             <a:fld id="{0495B665-C8E0-4414-8FEF-82ED686654F1}" type="datetimeFigureOut">
               <a:rPr lang="zh-TW" altLang="en-US" smtClean="0"/>
-              <a:t>2024/3/29</a:t>
+              <a:t>2024/12/4</a:t>
             </a:fld>
             <a:endParaRPr lang="zh-TW" altLang="en-US"/>
           </a:p>
@@ -1932,7 +1937,7 @@
                 </a:solidFill>
               </a:rPr>
               <a:pPr/>
-              <a:t>3/29/2024</a:t>
+              <a:t>12/4/2024</a:t>
             </a:fld>
             <a:endParaRPr kumimoji="0" lang="en-US" dirty="0"/>
           </a:p>
@@ -2163,7 +2168,7 @@
                 </a:solidFill>
               </a:rPr>
               <a:pPr/>
-              <a:t>3/29/2024</a:t>
+              <a:t>12/4/2024</a:t>
             </a:fld>
             <a:endParaRPr kumimoji="0" lang="en-US" dirty="0"/>
           </a:p>
@@ -2396,7 +2401,7 @@
                 </a:solidFill>
               </a:rPr>
               <a:pPr/>
-              <a:t>3/29/2024</a:t>
+              <a:t>12/4/2024</a:t>
             </a:fld>
             <a:endParaRPr kumimoji="0" lang="en-US" dirty="0"/>
           </a:p>
@@ -2878,7 +2883,7 @@
                 </a:solidFill>
               </a:rPr>
               <a:pPr/>
-              <a:t>3/29/2024</a:t>
+              <a:t>12/4/2024</a:t>
             </a:fld>
             <a:endParaRPr kumimoji="0" lang="en-US" dirty="0"/>
           </a:p>
@@ -3235,7 +3240,7 @@
                 </a:solidFill>
               </a:rPr>
               <a:pPr/>
-              <a:t>3/29/2024</a:t>
+              <a:t>12/4/2024</a:t>
             </a:fld>
             <a:endParaRPr kumimoji="0" lang="en-US" dirty="0"/>
           </a:p>
@@ -3598,7 +3603,7 @@
                 </a:solidFill>
               </a:rPr>
               <a:pPr/>
-              <a:t>3/29/2024</a:t>
+              <a:t>12/4/2024</a:t>
             </a:fld>
             <a:endParaRPr kumimoji="0" lang="en-US" dirty="0"/>
           </a:p>
@@ -3908,7 +3913,7 @@
                 </a:solidFill>
               </a:rPr>
               <a:pPr/>
-              <a:t>3/29/2024</a:t>
+              <a:t>12/4/2024</a:t>
             </a:fld>
             <a:endParaRPr kumimoji="0" lang="en-US" dirty="0"/>
           </a:p>
@@ -4103,7 +4108,7 @@
           <a:p>
             <a:fld id="{0495B665-C8E0-4414-8FEF-82ED686654F1}" type="datetimeFigureOut">
               <a:rPr lang="zh-TW" altLang="en-US" smtClean="0"/>
-              <a:t>2024/3/29</a:t>
+              <a:t>2024/12/4</a:t>
             </a:fld>
             <a:endParaRPr lang="zh-TW" altLang="en-US"/>
           </a:p>
@@ -4587,7 +4592,7 @@
                 </a:solidFill>
               </a:rPr>
               <a:pPr/>
-              <a:t>3/29/2024</a:t>
+              <a:t>12/4/2024</a:t>
             </a:fld>
             <a:endParaRPr kumimoji="0" lang="en-US" dirty="0"/>
           </a:p>
@@ -4983,7 +4988,7 @@
                 </a:solidFill>
               </a:rPr>
               <a:pPr/>
-              <a:t>3/29/2024</a:t>
+              <a:t>12/4/2024</a:t>
             </a:fld>
             <a:endParaRPr kumimoji="0" lang="en-US" dirty="0"/>
           </a:p>
@@ -5323,7 +5328,7 @@
                 </a:solidFill>
               </a:rPr>
               <a:pPr/>
-              <a:t>3/29/2024</a:t>
+              <a:t>12/4/2024</a:t>
             </a:fld>
             <a:endParaRPr kumimoji="0" lang="en-US" dirty="0"/>
           </a:p>
@@ -5904,7 +5909,7 @@
                 </a:solidFill>
               </a:rPr>
               <a:pPr/>
-              <a:t>3/29/2024</a:t>
+              <a:t>12/4/2024</a:t>
             </a:fld>
             <a:endParaRPr kumimoji="0" lang="en-US" dirty="0"/>
           </a:p>
@@ -6473,7 +6478,7 @@
                 </a:solidFill>
               </a:rPr>
               <a:pPr/>
-              <a:t>3/29/2024</a:t>
+              <a:t>12/4/2024</a:t>
             </a:fld>
             <a:endParaRPr kumimoji="0" lang="en-US" dirty="0"/>
           </a:p>
@@ -6937,7 +6942,7 @@
                 </a:solidFill>
               </a:rPr>
               <a:pPr/>
-              <a:t>3/29/2024</a:t>
+              <a:t>12/4/2024</a:t>
             </a:fld>
             <a:endParaRPr kumimoji="0" lang="en-US" dirty="0"/>
           </a:p>
@@ -7366,7 +7371,7 @@
                 </a:solidFill>
               </a:rPr>
               <a:pPr/>
-              <a:t>3/29/2024</a:t>
+              <a:t>12/4/2024</a:t>
             </a:fld>
             <a:endParaRPr kumimoji="0" lang="en-US" dirty="0"/>
           </a:p>
@@ -7875,7 +7880,7 @@
                 </a:solidFill>
               </a:rPr>
               <a:pPr/>
-              <a:t>3/29/2024</a:t>
+              <a:t>12/4/2024</a:t>
             </a:fld>
             <a:endParaRPr kumimoji="0" lang="en-US" dirty="0"/>
           </a:p>
@@ -8384,7 +8389,7 @@
                 </a:solidFill>
               </a:rPr>
               <a:pPr/>
-              <a:t>3/29/2024</a:t>
+              <a:t>12/4/2024</a:t>
             </a:fld>
             <a:endParaRPr kumimoji="0" lang="en-US" dirty="0"/>
           </a:p>
@@ -8605,7 +8610,7 @@
                 </a:solidFill>
               </a:rPr>
               <a:pPr/>
-              <a:t>3/29/2024</a:t>
+              <a:t>12/4/2024</a:t>
             </a:fld>
             <a:endParaRPr kumimoji="0" lang="en-US" dirty="0"/>
           </a:p>
@@ -8877,7 +8882,7 @@
           <a:p>
             <a:fld id="{0495B665-C8E0-4414-8FEF-82ED686654F1}" type="datetimeFigureOut">
               <a:rPr lang="zh-TW" altLang="en-US" smtClean="0"/>
-              <a:t>2024/3/29</a:t>
+              <a:t>2024/12/4</a:t>
             </a:fld>
             <a:endParaRPr lang="zh-TW" altLang="en-US"/>
           </a:p>
@@ -9213,7 +9218,7 @@
                 </a:solidFill>
               </a:rPr>
               <a:pPr/>
-              <a:t>3/29/2024</a:t>
+              <a:t>12/4/2024</a:t>
             </a:fld>
             <a:endParaRPr kumimoji="0" lang="en-US" dirty="0"/>
           </a:p>
@@ -9437,7 +9442,7 @@
                 </a:solidFill>
               </a:rPr>
               <a:pPr/>
-              <a:t>3/29/2024</a:t>
+              <a:t>12/4/2024</a:t>
             </a:fld>
             <a:endParaRPr kumimoji="0" lang="en-US" dirty="0"/>
           </a:p>
@@ -9618,7 +9623,7 @@
             <a:fld id="{ACB2EC6F-6501-4E04-BD6C-A8A6CABB2C5B}" type="datetimeFigureOut">
               <a:rPr kumimoji="0" lang="en-US" smtClean="0"/>
               <a:pPr/>
-              <a:t>3/29/2024</a:t>
+              <a:t>12/4/2024</a:t>
             </a:fld>
             <a:endParaRPr kumimoji="0" lang="en-US" dirty="0"/>
           </a:p>
@@ -9902,7 +9907,7 @@
           <a:p>
             <a:fld id="{0495B665-C8E0-4414-8FEF-82ED686654F1}" type="datetimeFigureOut">
               <a:rPr lang="zh-TW" altLang="en-US" smtClean="0"/>
-              <a:t>2024/3/29</a:t>
+              <a:t>2024/12/4</a:t>
             </a:fld>
             <a:endParaRPr lang="zh-TW" altLang="en-US"/>
           </a:p>
@@ -10314,7 +10319,7 @@
           <a:p>
             <a:fld id="{0495B665-C8E0-4414-8FEF-82ED686654F1}" type="datetimeFigureOut">
               <a:rPr lang="zh-TW" altLang="en-US" smtClean="0"/>
-              <a:t>2024/3/29</a:t>
+              <a:t>2024/12/4</a:t>
             </a:fld>
             <a:endParaRPr lang="zh-TW" altLang="en-US"/>
           </a:p>
@@ -10455,7 +10460,7 @@
           <a:p>
             <a:fld id="{0495B665-C8E0-4414-8FEF-82ED686654F1}" type="datetimeFigureOut">
               <a:rPr lang="zh-TW" altLang="en-US" smtClean="0"/>
-              <a:t>2024/3/29</a:t>
+              <a:t>2024/12/4</a:t>
             </a:fld>
             <a:endParaRPr lang="zh-TW" altLang="en-US"/>
           </a:p>
@@ -10568,7 +10573,7 @@
           <a:p>
             <a:fld id="{0495B665-C8E0-4414-8FEF-82ED686654F1}" type="datetimeFigureOut">
               <a:rPr lang="zh-TW" altLang="en-US" smtClean="0"/>
-              <a:t>2024/3/29</a:t>
+              <a:t>2024/12/4</a:t>
             </a:fld>
             <a:endParaRPr lang="zh-TW" altLang="en-US"/>
           </a:p>
@@ -10879,7 +10884,7 @@
           <a:p>
             <a:fld id="{0495B665-C8E0-4414-8FEF-82ED686654F1}" type="datetimeFigureOut">
               <a:rPr lang="zh-TW" altLang="en-US" smtClean="0"/>
-              <a:t>2024/3/29</a:t>
+              <a:t>2024/12/4</a:t>
             </a:fld>
             <a:endParaRPr lang="zh-TW" altLang="en-US"/>
           </a:p>
@@ -11167,7 +11172,7 @@
           <a:p>
             <a:fld id="{0495B665-C8E0-4414-8FEF-82ED686654F1}" type="datetimeFigureOut">
               <a:rPr lang="zh-TW" altLang="en-US" smtClean="0"/>
-              <a:t>2024/3/29</a:t>
+              <a:t>2024/12/4</a:t>
             </a:fld>
             <a:endParaRPr lang="zh-TW" altLang="en-US"/>
           </a:p>
@@ -11408,7 +11413,7 @@
           <a:p>
             <a:fld id="{0495B665-C8E0-4414-8FEF-82ED686654F1}" type="datetimeFigureOut">
               <a:rPr lang="zh-TW" altLang="en-US" smtClean="0"/>
-              <a:t>2024/3/29</a:t>
+              <a:t>2024/12/4</a:t>
             </a:fld>
             <a:endParaRPr lang="zh-TW" altLang="en-US"/>
           </a:p>
@@ -11980,7 +11985,7 @@
                 </a:solidFill>
               </a:rPr>
               <a:pPr/>
-              <a:t>3/29/2024</a:t>
+              <a:t>12/4/2024</a:t>
             </a:fld>
             <a:endParaRPr kumimoji="0" lang="en-US" sz="1200" dirty="0">
               <a:solidFill>

--- a/Slides/Week03/03：編碼器模型.pptx
+++ b/Slides/Week03/03：編碼器模型.pptx
@@ -202,7 +202,7 @@
           <a:p>
             <a:fld id="{DF2768FB-F680-46BA-8721-EBD5055783A4}" type="datetimeFigureOut">
               <a:rPr lang="zh-TW" altLang="en-US" smtClean="0"/>
-              <a:t>2024/12/4</a:t>
+              <a:t>2024/12/9</a:t>
             </a:fld>
             <a:endParaRPr lang="zh-TW" altLang="en-US"/>
           </a:p>
@@ -1150,7 +1150,7 @@
           <a:p>
             <a:fld id="{0495B665-C8E0-4414-8FEF-82ED686654F1}" type="datetimeFigureOut">
               <a:rPr lang="zh-TW" altLang="en-US" smtClean="0"/>
-              <a:t>2024/12/4</a:t>
+              <a:t>2024/12/9</a:t>
             </a:fld>
             <a:endParaRPr lang="zh-TW" altLang="en-US"/>
           </a:p>
@@ -1348,7 +1348,7 @@
           <a:p>
             <a:fld id="{0495B665-C8E0-4414-8FEF-82ED686654F1}" type="datetimeFigureOut">
               <a:rPr lang="zh-TW" altLang="en-US" smtClean="0"/>
-              <a:t>2024/12/4</a:t>
+              <a:t>2024/12/9</a:t>
             </a:fld>
             <a:endParaRPr lang="zh-TW" altLang="en-US"/>
           </a:p>
@@ -1556,7 +1556,7 @@
           <a:p>
             <a:fld id="{0495B665-C8E0-4414-8FEF-82ED686654F1}" type="datetimeFigureOut">
               <a:rPr lang="zh-TW" altLang="en-US" smtClean="0"/>
-              <a:t>2024/12/4</a:t>
+              <a:t>2024/12/9</a:t>
             </a:fld>
             <a:endParaRPr lang="zh-TW" altLang="en-US"/>
           </a:p>
@@ -1937,7 +1937,7 @@
                 </a:solidFill>
               </a:rPr>
               <a:pPr/>
-              <a:t>12/4/2024</a:t>
+              <a:t>12/9/2024</a:t>
             </a:fld>
             <a:endParaRPr kumimoji="0" lang="en-US" dirty="0"/>
           </a:p>
@@ -2168,7 +2168,7 @@
                 </a:solidFill>
               </a:rPr>
               <a:pPr/>
-              <a:t>12/4/2024</a:t>
+              <a:t>12/9/2024</a:t>
             </a:fld>
             <a:endParaRPr kumimoji="0" lang="en-US" dirty="0"/>
           </a:p>
@@ -2401,7 +2401,7 @@
                 </a:solidFill>
               </a:rPr>
               <a:pPr/>
-              <a:t>12/4/2024</a:t>
+              <a:t>12/9/2024</a:t>
             </a:fld>
             <a:endParaRPr kumimoji="0" lang="en-US" dirty="0"/>
           </a:p>
@@ -2883,7 +2883,7 @@
                 </a:solidFill>
               </a:rPr>
               <a:pPr/>
-              <a:t>12/4/2024</a:t>
+              <a:t>12/9/2024</a:t>
             </a:fld>
             <a:endParaRPr kumimoji="0" lang="en-US" dirty="0"/>
           </a:p>
@@ -3240,7 +3240,7 @@
                 </a:solidFill>
               </a:rPr>
               <a:pPr/>
-              <a:t>12/4/2024</a:t>
+              <a:t>12/9/2024</a:t>
             </a:fld>
             <a:endParaRPr kumimoji="0" lang="en-US" dirty="0"/>
           </a:p>
@@ -3603,7 +3603,7 @@
                 </a:solidFill>
               </a:rPr>
               <a:pPr/>
-              <a:t>12/4/2024</a:t>
+              <a:t>12/9/2024</a:t>
             </a:fld>
             <a:endParaRPr kumimoji="0" lang="en-US" dirty="0"/>
           </a:p>
@@ -3913,7 +3913,7 @@
                 </a:solidFill>
               </a:rPr>
               <a:pPr/>
-              <a:t>12/4/2024</a:t>
+              <a:t>12/9/2024</a:t>
             </a:fld>
             <a:endParaRPr kumimoji="0" lang="en-US" dirty="0"/>
           </a:p>
@@ -4108,7 +4108,7 @@
           <a:p>
             <a:fld id="{0495B665-C8E0-4414-8FEF-82ED686654F1}" type="datetimeFigureOut">
               <a:rPr lang="zh-TW" altLang="en-US" smtClean="0"/>
-              <a:t>2024/12/4</a:t>
+              <a:t>2024/12/9</a:t>
             </a:fld>
             <a:endParaRPr lang="zh-TW" altLang="en-US"/>
           </a:p>
@@ -4592,7 +4592,7 @@
                 </a:solidFill>
               </a:rPr>
               <a:pPr/>
-              <a:t>12/4/2024</a:t>
+              <a:t>12/9/2024</a:t>
             </a:fld>
             <a:endParaRPr kumimoji="0" lang="en-US" dirty="0"/>
           </a:p>
@@ -4988,7 +4988,7 @@
                 </a:solidFill>
               </a:rPr>
               <a:pPr/>
-              <a:t>12/4/2024</a:t>
+              <a:t>12/9/2024</a:t>
             </a:fld>
             <a:endParaRPr kumimoji="0" lang="en-US" dirty="0"/>
           </a:p>
@@ -5328,7 +5328,7 @@
                 </a:solidFill>
               </a:rPr>
               <a:pPr/>
-              <a:t>12/4/2024</a:t>
+              <a:t>12/9/2024</a:t>
             </a:fld>
             <a:endParaRPr kumimoji="0" lang="en-US" dirty="0"/>
           </a:p>
@@ -5909,7 +5909,7 @@
                 </a:solidFill>
               </a:rPr>
               <a:pPr/>
-              <a:t>12/4/2024</a:t>
+              <a:t>12/9/2024</a:t>
             </a:fld>
             <a:endParaRPr kumimoji="0" lang="en-US" dirty="0"/>
           </a:p>
@@ -6478,7 +6478,7 @@
                 </a:solidFill>
               </a:rPr>
               <a:pPr/>
-              <a:t>12/4/2024</a:t>
+              <a:t>12/9/2024</a:t>
             </a:fld>
             <a:endParaRPr kumimoji="0" lang="en-US" dirty="0"/>
           </a:p>
@@ -6942,7 +6942,7 @@
                 </a:solidFill>
               </a:rPr>
               <a:pPr/>
-              <a:t>12/4/2024</a:t>
+              <a:t>12/9/2024</a:t>
             </a:fld>
             <a:endParaRPr kumimoji="0" lang="en-US" dirty="0"/>
           </a:p>
@@ -7371,7 +7371,7 @@
                 </a:solidFill>
               </a:rPr>
               <a:pPr/>
-              <a:t>12/4/2024</a:t>
+              <a:t>12/9/2024</a:t>
             </a:fld>
             <a:endParaRPr kumimoji="0" lang="en-US" dirty="0"/>
           </a:p>
@@ -7880,7 +7880,7 @@
                 </a:solidFill>
               </a:rPr>
               <a:pPr/>
-              <a:t>12/4/2024</a:t>
+              <a:t>12/9/2024</a:t>
             </a:fld>
             <a:endParaRPr kumimoji="0" lang="en-US" dirty="0"/>
           </a:p>
@@ -8389,7 +8389,7 @@
                 </a:solidFill>
               </a:rPr>
               <a:pPr/>
-              <a:t>12/4/2024</a:t>
+              <a:t>12/9/2024</a:t>
             </a:fld>
             <a:endParaRPr kumimoji="0" lang="en-US" dirty="0"/>
           </a:p>
@@ -8610,7 +8610,7 @@
                 </a:solidFill>
               </a:rPr>
               <a:pPr/>
-              <a:t>12/4/2024</a:t>
+              <a:t>12/9/2024</a:t>
             </a:fld>
             <a:endParaRPr kumimoji="0" lang="en-US" dirty="0"/>
           </a:p>
@@ -8882,7 +8882,7 @@
           <a:p>
             <a:fld id="{0495B665-C8E0-4414-8FEF-82ED686654F1}" type="datetimeFigureOut">
               <a:rPr lang="zh-TW" altLang="en-US" smtClean="0"/>
-              <a:t>2024/12/4</a:t>
+              <a:t>2024/12/9</a:t>
             </a:fld>
             <a:endParaRPr lang="zh-TW" altLang="en-US"/>
           </a:p>
@@ -9218,7 +9218,7 @@
                 </a:solidFill>
               </a:rPr>
               <a:pPr/>
-              <a:t>12/4/2024</a:t>
+              <a:t>12/9/2024</a:t>
             </a:fld>
             <a:endParaRPr kumimoji="0" lang="en-US" dirty="0"/>
           </a:p>
@@ -9442,7 +9442,7 @@
                 </a:solidFill>
               </a:rPr>
               <a:pPr/>
-              <a:t>12/4/2024</a:t>
+              <a:t>12/9/2024</a:t>
             </a:fld>
             <a:endParaRPr kumimoji="0" lang="en-US" dirty="0"/>
           </a:p>
@@ -9623,7 +9623,7 @@
             <a:fld id="{ACB2EC6F-6501-4E04-BD6C-A8A6CABB2C5B}" type="datetimeFigureOut">
               <a:rPr kumimoji="0" lang="en-US" smtClean="0"/>
               <a:pPr/>
-              <a:t>12/4/2024</a:t>
+              <a:t>12/9/2024</a:t>
             </a:fld>
             <a:endParaRPr kumimoji="0" lang="en-US" dirty="0"/>
           </a:p>
@@ -9907,7 +9907,7 @@
           <a:p>
             <a:fld id="{0495B665-C8E0-4414-8FEF-82ED686654F1}" type="datetimeFigureOut">
               <a:rPr lang="zh-TW" altLang="en-US" smtClean="0"/>
-              <a:t>2024/12/4</a:t>
+              <a:t>2024/12/9</a:t>
             </a:fld>
             <a:endParaRPr lang="zh-TW" altLang="en-US"/>
           </a:p>
@@ -10319,7 +10319,7 @@
           <a:p>
             <a:fld id="{0495B665-C8E0-4414-8FEF-82ED686654F1}" type="datetimeFigureOut">
               <a:rPr lang="zh-TW" altLang="en-US" smtClean="0"/>
-              <a:t>2024/12/4</a:t>
+              <a:t>2024/12/9</a:t>
             </a:fld>
             <a:endParaRPr lang="zh-TW" altLang="en-US"/>
           </a:p>
@@ -10460,7 +10460,7 @@
           <a:p>
             <a:fld id="{0495B665-C8E0-4414-8FEF-82ED686654F1}" type="datetimeFigureOut">
               <a:rPr lang="zh-TW" altLang="en-US" smtClean="0"/>
-              <a:t>2024/12/4</a:t>
+              <a:t>2024/12/9</a:t>
             </a:fld>
             <a:endParaRPr lang="zh-TW" altLang="en-US"/>
           </a:p>
@@ -10573,7 +10573,7 @@
           <a:p>
             <a:fld id="{0495B665-C8E0-4414-8FEF-82ED686654F1}" type="datetimeFigureOut">
               <a:rPr lang="zh-TW" altLang="en-US" smtClean="0"/>
-              <a:t>2024/12/4</a:t>
+              <a:t>2024/12/9</a:t>
             </a:fld>
             <a:endParaRPr lang="zh-TW" altLang="en-US"/>
           </a:p>
@@ -10884,7 +10884,7 @@
           <a:p>
             <a:fld id="{0495B665-C8E0-4414-8FEF-82ED686654F1}" type="datetimeFigureOut">
               <a:rPr lang="zh-TW" altLang="en-US" smtClean="0"/>
-              <a:t>2024/12/4</a:t>
+              <a:t>2024/12/9</a:t>
             </a:fld>
             <a:endParaRPr lang="zh-TW" altLang="en-US"/>
           </a:p>
@@ -11172,7 +11172,7 @@
           <a:p>
             <a:fld id="{0495B665-C8E0-4414-8FEF-82ED686654F1}" type="datetimeFigureOut">
               <a:rPr lang="zh-TW" altLang="en-US" smtClean="0"/>
-              <a:t>2024/12/4</a:t>
+              <a:t>2024/12/9</a:t>
             </a:fld>
             <a:endParaRPr lang="zh-TW" altLang="en-US"/>
           </a:p>
@@ -11413,7 +11413,7 @@
           <a:p>
             <a:fld id="{0495B665-C8E0-4414-8FEF-82ED686654F1}" type="datetimeFigureOut">
               <a:rPr lang="zh-TW" altLang="en-US" smtClean="0"/>
-              <a:t>2024/12/4</a:t>
+              <a:t>2024/12/9</a:t>
             </a:fld>
             <a:endParaRPr lang="zh-TW" altLang="en-US"/>
           </a:p>
@@ -11985,7 +11985,7 @@
                 </a:solidFill>
               </a:rPr>
               <a:pPr/>
-              <a:t>12/4/2024</a:t>
+              <a:t>12/9/2024</a:t>
             </a:fld>
             <a:endParaRPr kumimoji="0" lang="en-US" sz="1200" dirty="0">
               <a:solidFill>
@@ -13313,7 +13313,7 @@
         </p:blipFill>
         <p:spPr>
           <a:xfrm>
-            <a:off x="685800" y="793074"/>
+            <a:off x="685800" y="778001"/>
             <a:ext cx="8458200" cy="5737017"/>
           </a:xfrm>
           <a:prstGeom prst="rect">
